--- a/Documentación/EP3_Plan_de_Pruebas.pptx
+++ b/Documentación/EP3_Plan_de_Pruebas.pptx
@@ -1906,6 +1906,13 @@
             <a:prstDash val="solid"/>
           </a:ln>
         </p:spPr>
+        <p:txBody>
+          <a:bodyPr/>
+          <a:lstStyle/>
+          <a:p>
+            <a:endParaRPr lang="es-CL"/>
+          </a:p>
+        </p:txBody>
       </p:sp>
       <p:sp>
         <p:nvSpPr>
@@ -1935,6 +1942,13 @@
             <a:prstDash val="solid"/>
           </a:ln>
         </p:spPr>
+        <p:txBody>
+          <a:bodyPr/>
+          <a:lstStyle/>
+          <a:p>
+            <a:endParaRPr lang="es-CL"/>
+          </a:p>
+        </p:txBody>
       </p:sp>
       <p:sp>
         <p:nvSpPr>
@@ -1960,6 +1974,13 @@
             <a:prstDash val="solid"/>
           </a:ln>
         </p:spPr>
+        <p:txBody>
+          <a:bodyPr/>
+          <a:lstStyle/>
+          <a:p>
+            <a:endParaRPr lang="es-CL"/>
+          </a:p>
+        </p:txBody>
       </p:sp>
       <p:pic>
         <p:nvPicPr>
@@ -2060,45 +2081,6 @@
               <a:t>Plan de Pruebas — CFD Servicios</a:t>
             </a:r>
             <a:endParaRPr lang="en-US" sz="4000" dirty="0"/>
-          </a:p>
-        </p:txBody>
-      </p:sp>
-      <p:sp>
-        <p:nvSpPr>
-          <p:cNvPr id="8" name="Text 5"/>
-          <p:cNvSpPr/>
-          <p:nvPr/>
-        </p:nvSpPr>
-        <p:spPr>
-          <a:xfrm>
-            <a:off x="548640" y="2880360"/>
-            <a:ext cx="8046720" cy="457200"/>
-          </a:xfrm>
-          <a:prstGeom prst="rect">
-            <a:avLst/>
-          </a:prstGeom>
-          <a:noFill/>
-          <a:ln/>
-        </p:spPr>
-        <p:txBody>
-          <a:bodyPr wrap="square" lIns="0" tIns="0" rIns="0" bIns="0" rtlCol="0" anchor="ctr"/>
-          <a:lstStyle/>
-          <a:p>
-            <a:pPr marL="0" indent="0" algn="l">
-              <a:buNone/>
-            </a:pPr>
-            <a:r>
-              <a:rPr lang="en-US" sz="1800" i="1" dirty="0">
-                <a:solidFill>
-                  <a:srgbClr val="94A3B8"/>
-                </a:solidFill>
-                <a:latin typeface="Calibri" pitchFamily="34" charset="0"/>
-                <a:ea typeface="Calibri" pitchFamily="34" charset="-122"/>
-                <a:cs typeface="Calibri" pitchFamily="34" charset="-120"/>
-              </a:rPr>
-              <a:t>Verificación de la solución y su calidad</a:t>
-            </a:r>
-            <a:endParaRPr lang="en-US" sz="1800" dirty="0"/>
           </a:p>
         </p:txBody>
       </p:sp>
@@ -2133,6 +2115,13 @@
             </a:outerShdw>
           </a:effectLst>
         </p:spPr>
+        <p:txBody>
+          <a:bodyPr/>
+          <a:lstStyle/>
+          <a:p>
+            <a:endParaRPr lang="es-CL"/>
+          </a:p>
+        </p:txBody>
       </p:sp>
       <p:sp>
         <p:nvSpPr>
@@ -2216,6 +2205,13 @@
             </a:outerShdw>
           </a:effectLst>
         </p:spPr>
+        <p:txBody>
+          <a:bodyPr/>
+          <a:lstStyle/>
+          <a:p>
+            <a:endParaRPr lang="es-CL"/>
+          </a:p>
+        </p:txBody>
       </p:sp>
       <p:sp>
         <p:nvSpPr>
@@ -2410,6 +2406,13 @@
             </a:outerShdw>
           </a:effectLst>
         </p:spPr>
+        <p:txBody>
+          <a:bodyPr/>
+          <a:lstStyle/>
+          <a:p>
+            <a:endParaRPr lang="es-CL"/>
+          </a:p>
+        </p:txBody>
       </p:sp>
       <p:sp>
         <p:nvSpPr>
@@ -2435,6 +2438,13 @@
             <a:prstDash val="solid"/>
           </a:ln>
         </p:spPr>
+        <p:txBody>
+          <a:bodyPr/>
+          <a:lstStyle/>
+          <a:p>
+            <a:endParaRPr lang="es-CL"/>
+          </a:p>
+        </p:txBody>
       </p:sp>
       <p:sp>
         <p:nvSpPr>
@@ -2584,6 +2594,13 @@
             </a:outerShdw>
           </a:effectLst>
         </p:spPr>
+        <p:txBody>
+          <a:bodyPr/>
+          <a:lstStyle/>
+          <a:p>
+            <a:endParaRPr lang="es-CL"/>
+          </a:p>
+        </p:txBody>
       </p:sp>
       <p:sp>
         <p:nvSpPr>
@@ -2609,6 +2626,13 @@
             <a:prstDash val="solid"/>
           </a:ln>
         </p:spPr>
+        <p:txBody>
+          <a:bodyPr/>
+          <a:lstStyle/>
+          <a:p>
+            <a:endParaRPr lang="es-CL"/>
+          </a:p>
+        </p:txBody>
       </p:sp>
       <p:sp>
         <p:nvSpPr>
@@ -2758,6 +2782,13 @@
             </a:outerShdw>
           </a:effectLst>
         </p:spPr>
+        <p:txBody>
+          <a:bodyPr/>
+          <a:lstStyle/>
+          <a:p>
+            <a:endParaRPr lang="es-CL"/>
+          </a:p>
+        </p:txBody>
       </p:sp>
       <p:sp>
         <p:nvSpPr>
@@ -2783,6 +2814,13 @@
             <a:prstDash val="solid"/>
           </a:ln>
         </p:spPr>
+        <p:txBody>
+          <a:bodyPr/>
+          <a:lstStyle/>
+          <a:p>
+            <a:endParaRPr lang="es-CL"/>
+          </a:p>
+        </p:txBody>
       </p:sp>
       <p:sp>
         <p:nvSpPr>
@@ -2932,6 +2970,13 @@
             </a:outerShdw>
           </a:effectLst>
         </p:spPr>
+        <p:txBody>
+          <a:bodyPr/>
+          <a:lstStyle/>
+          <a:p>
+            <a:endParaRPr lang="es-CL"/>
+          </a:p>
+        </p:txBody>
       </p:sp>
       <p:sp>
         <p:nvSpPr>
@@ -2957,6 +3002,13 @@
             <a:prstDash val="solid"/>
           </a:ln>
         </p:spPr>
+        <p:txBody>
+          <a:bodyPr/>
+          <a:lstStyle/>
+          <a:p>
+            <a:endParaRPr lang="es-CL"/>
+          </a:p>
+        </p:txBody>
       </p:sp>
       <p:sp>
         <p:nvSpPr>
@@ -3136,6 +3188,13 @@
             <a:prstDash val="solid"/>
           </a:ln>
         </p:spPr>
+        <p:txBody>
+          <a:bodyPr/>
+          <a:lstStyle/>
+          <a:p>
+            <a:endParaRPr lang="es-CL"/>
+          </a:p>
+        </p:txBody>
       </p:sp>
       <p:sp>
         <p:nvSpPr>
@@ -3165,6 +3224,13 @@
             <a:prstDash val="solid"/>
           </a:ln>
         </p:spPr>
+        <p:txBody>
+          <a:bodyPr/>
+          <a:lstStyle/>
+          <a:p>
+            <a:endParaRPr lang="es-CL"/>
+          </a:p>
+        </p:txBody>
       </p:sp>
       <p:sp>
         <p:nvSpPr>
@@ -3268,6 +3334,13 @@
             <a:prstDash val="solid"/>
           </a:ln>
         </p:spPr>
+        <p:txBody>
+          <a:bodyPr/>
+          <a:lstStyle/>
+          <a:p>
+            <a:endParaRPr lang="es-CL"/>
+          </a:p>
+        </p:txBody>
       </p:sp>
       <p:sp>
         <p:nvSpPr>
@@ -3339,6 +3412,13 @@
             </a:outerShdw>
           </a:effectLst>
         </p:spPr>
+        <p:txBody>
+          <a:bodyPr/>
+          <a:lstStyle/>
+          <a:p>
+            <a:endParaRPr lang="es-CL"/>
+          </a:p>
+        </p:txBody>
       </p:sp>
       <p:sp>
         <p:nvSpPr>
@@ -3364,6 +3444,13 @@
             <a:prstDash val="solid"/>
           </a:ln>
         </p:spPr>
+        <p:txBody>
+          <a:bodyPr/>
+          <a:lstStyle/>
+          <a:p>
+            <a:endParaRPr lang="es-CL"/>
+          </a:p>
+        </p:txBody>
       </p:sp>
       <p:sp>
         <p:nvSpPr>
@@ -3474,6 +3561,13 @@
             </a:outerShdw>
           </a:effectLst>
         </p:spPr>
+        <p:txBody>
+          <a:bodyPr/>
+          <a:lstStyle/>
+          <a:p>
+            <a:endParaRPr lang="es-CL"/>
+          </a:p>
+        </p:txBody>
       </p:sp>
       <p:sp>
         <p:nvSpPr>
@@ -3499,6 +3593,13 @@
             <a:prstDash val="solid"/>
           </a:ln>
         </p:spPr>
+        <p:txBody>
+          <a:bodyPr/>
+          <a:lstStyle/>
+          <a:p>
+            <a:endParaRPr lang="es-CL"/>
+          </a:p>
+        </p:txBody>
       </p:sp>
       <p:sp>
         <p:nvSpPr>
@@ -3713,6 +3814,13 @@
             <a:prstDash val="solid"/>
           </a:ln>
         </p:spPr>
+        <p:txBody>
+          <a:bodyPr/>
+          <a:lstStyle/>
+          <a:p>
+            <a:endParaRPr lang="es-CL"/>
+          </a:p>
+        </p:txBody>
       </p:sp>
       <p:sp>
         <p:nvSpPr>
@@ -3816,6 +3924,13 @@
             <a:prstDash val="solid"/>
           </a:ln>
         </p:spPr>
+        <p:txBody>
+          <a:bodyPr/>
+          <a:lstStyle/>
+          <a:p>
+            <a:endParaRPr lang="es-CL"/>
+          </a:p>
+        </p:txBody>
       </p:sp>
       <p:sp>
         <p:nvSpPr>
@@ -3919,6 +4034,13 @@
             <a:prstDash val="solid"/>
           </a:ln>
         </p:spPr>
+        <p:txBody>
+          <a:bodyPr/>
+          <a:lstStyle/>
+          <a:p>
+            <a:endParaRPr lang="es-CL"/>
+          </a:p>
+        </p:txBody>
       </p:sp>
       <p:sp>
         <p:nvSpPr>
@@ -4022,6 +4144,13 @@
             <a:prstDash val="solid"/>
           </a:ln>
         </p:spPr>
+        <p:txBody>
+          <a:bodyPr/>
+          <a:lstStyle/>
+          <a:p>
+            <a:endParaRPr lang="es-CL"/>
+          </a:p>
+        </p:txBody>
       </p:sp>
       <p:sp>
         <p:nvSpPr>
@@ -4125,6 +4254,13 @@
             <a:prstDash val="solid"/>
           </a:ln>
         </p:spPr>
+        <p:txBody>
+          <a:bodyPr/>
+          <a:lstStyle/>
+          <a:p>
+            <a:endParaRPr lang="es-CL"/>
+          </a:p>
+        </p:txBody>
       </p:sp>
       <p:sp>
         <p:nvSpPr>
@@ -4228,6 +4364,13 @@
             <a:prstDash val="solid"/>
           </a:ln>
         </p:spPr>
+        <p:txBody>
+          <a:bodyPr/>
+          <a:lstStyle/>
+          <a:p>
+            <a:endParaRPr lang="es-CL"/>
+          </a:p>
+        </p:txBody>
       </p:sp>
       <p:sp>
         <p:nvSpPr>
@@ -4331,6 +4474,13 @@
             <a:prstDash val="solid"/>
           </a:ln>
         </p:spPr>
+        <p:txBody>
+          <a:bodyPr/>
+          <a:lstStyle/>
+          <a:p>
+            <a:endParaRPr lang="es-CL"/>
+          </a:p>
+        </p:txBody>
       </p:sp>
       <p:sp>
         <p:nvSpPr>
@@ -4549,6 +4699,13 @@
             </a:outerShdw>
           </a:effectLst>
         </p:spPr>
+        <p:txBody>
+          <a:bodyPr/>
+          <a:lstStyle/>
+          <a:p>
+            <a:endParaRPr lang="es-CL"/>
+          </a:p>
+        </p:txBody>
       </p:sp>
       <p:sp>
         <p:nvSpPr>
@@ -4574,6 +4731,13 @@
             <a:prstDash val="solid"/>
           </a:ln>
         </p:spPr>
+        <p:txBody>
+          <a:bodyPr/>
+          <a:lstStyle/>
+          <a:p>
+            <a:endParaRPr lang="es-CL"/>
+          </a:p>
+        </p:txBody>
       </p:sp>
       <p:sp>
         <p:nvSpPr>
@@ -4606,6 +4770,13 @@
             </a:outerShdw>
           </a:effectLst>
         </p:spPr>
+        <p:txBody>
+          <a:bodyPr/>
+          <a:lstStyle/>
+          <a:p>
+            <a:endParaRPr lang="es-CL"/>
+          </a:p>
+        </p:txBody>
       </p:sp>
       <p:sp>
         <p:nvSpPr>
@@ -4631,6 +4802,13 @@
             <a:prstDash val="solid"/>
           </a:ln>
         </p:spPr>
+        <p:txBody>
+          <a:bodyPr/>
+          <a:lstStyle/>
+          <a:p>
+            <a:endParaRPr lang="es-CL"/>
+          </a:p>
+        </p:txBody>
       </p:sp>
       <p:sp>
         <p:nvSpPr>
@@ -4663,6 +4841,13 @@
             </a:outerShdw>
           </a:effectLst>
         </p:spPr>
+        <p:txBody>
+          <a:bodyPr/>
+          <a:lstStyle/>
+          <a:p>
+            <a:endParaRPr lang="es-CL"/>
+          </a:p>
+        </p:txBody>
       </p:sp>
       <p:sp>
         <p:nvSpPr>
@@ -4688,6 +4873,13 @@
             <a:prstDash val="solid"/>
           </a:ln>
         </p:spPr>
+        <p:txBody>
+          <a:bodyPr/>
+          <a:lstStyle/>
+          <a:p>
+            <a:endParaRPr lang="es-CL"/>
+          </a:p>
+        </p:txBody>
       </p:sp>
       <p:pic>
         <p:nvPicPr>
@@ -5121,6 +5313,13 @@
             <a:prstDash val="solid"/>
           </a:ln>
         </p:spPr>
+        <p:txBody>
+          <a:bodyPr/>
+          <a:lstStyle/>
+          <a:p>
+            <a:endParaRPr lang="es-CL"/>
+          </a:p>
+        </p:txBody>
       </p:sp>
       <p:sp>
         <p:nvSpPr>
@@ -5257,6 +5456,13 @@
             <a:prstDash val="solid"/>
           </a:ln>
         </p:spPr>
+        <p:txBody>
+          <a:bodyPr/>
+          <a:lstStyle/>
+          <a:p>
+            <a:endParaRPr lang="es-CL"/>
+          </a:p>
+        </p:txBody>
       </p:sp>
       <p:sp>
         <p:nvSpPr>
@@ -5572,52 +5778,13 @@
       </p:sp>
       <p:sp>
         <p:nvSpPr>
-          <p:cNvPr id="12" name="Text 10"/>
-          <p:cNvSpPr/>
-          <p:nvPr/>
-        </p:nvSpPr>
-        <p:spPr>
-          <a:xfrm>
-            <a:off x="4663440" y="3081528"/>
-            <a:ext cx="3931920" cy="329184"/>
-          </a:xfrm>
-          <a:prstGeom prst="rect">
-            <a:avLst/>
-          </a:prstGeom>
-          <a:noFill/>
-          <a:ln/>
-        </p:spPr>
-        <p:txBody>
-          <a:bodyPr wrap="square" lIns="0" tIns="0" rIns="0" bIns="0" rtlCol="0" anchor="ctr"/>
-          <a:lstStyle/>
-          <a:p>
-            <a:pPr marL="0" indent="0">
-              <a:buNone/>
-            </a:pPr>
-            <a:r>
-              <a:rPr lang="en-US" sz="1200" dirty="0">
-                <a:solidFill>
-                  <a:srgbClr val="64748B"/>
-                </a:solidFill>
-                <a:latin typeface="Calibri" pitchFamily="34" charset="0"/>
-                <a:ea typeface="Calibri" pitchFamily="34" charset="-122"/>
-                <a:cs typeface="Calibri" pitchFamily="34" charset="-120"/>
-              </a:rPr>
-              <a:t>✗  Auditoría de seguridad formal</a:t>
-            </a:r>
-            <a:endParaRPr lang="en-US" sz="1200" dirty="0"/>
-          </a:p>
-        </p:txBody>
-      </p:sp>
-      <p:sp>
-        <p:nvSpPr>
           <p:cNvPr id="13" name="Text 11"/>
           <p:cNvSpPr/>
           <p:nvPr/>
         </p:nvSpPr>
         <p:spPr>
           <a:xfrm>
-            <a:off x="4663440" y="3465576"/>
+            <a:off x="4663440" y="2979638"/>
             <a:ext cx="3931920" cy="329184"/>
           </a:xfrm>
           <a:prstGeom prst="rect">
@@ -5672,6 +5839,13 @@
             <a:prstDash val="solid"/>
           </a:ln>
         </p:spPr>
+        <p:txBody>
+          <a:bodyPr/>
+          <a:lstStyle/>
+          <a:p>
+            <a:endParaRPr lang="es-CL"/>
+          </a:p>
+        </p:txBody>
       </p:sp>
       <p:sp>
         <p:nvSpPr>
@@ -5848,6 +6022,13 @@
             </a:outerShdw>
           </a:effectLst>
         </p:spPr>
+        <p:txBody>
+          <a:bodyPr/>
+          <a:lstStyle/>
+          <a:p>
+            <a:endParaRPr lang="es-CL"/>
+          </a:p>
+        </p:txBody>
       </p:sp>
       <p:sp>
         <p:nvSpPr>
@@ -5873,6 +6054,13 @@
             <a:prstDash val="solid"/>
           </a:ln>
         </p:spPr>
+        <p:txBody>
+          <a:bodyPr/>
+          <a:lstStyle/>
+          <a:p>
+            <a:endParaRPr lang="es-CL"/>
+          </a:p>
+        </p:txBody>
       </p:sp>
       <p:sp>
         <p:nvSpPr>
@@ -5976,6 +6164,13 @@
             <a:prstDash val="solid"/>
           </a:ln>
         </p:spPr>
+        <p:txBody>
+          <a:bodyPr/>
+          <a:lstStyle/>
+          <a:p>
+            <a:endParaRPr lang="es-CL"/>
+          </a:p>
+        </p:txBody>
       </p:sp>
       <p:sp>
         <p:nvSpPr>
@@ -6118,6 +6313,13 @@
             <a:prstDash val="solid"/>
           </a:ln>
         </p:spPr>
+        <p:txBody>
+          <a:bodyPr/>
+          <a:lstStyle/>
+          <a:p>
+            <a:endParaRPr lang="es-CL"/>
+          </a:p>
+        </p:txBody>
       </p:sp>
       <p:sp>
         <p:nvSpPr>
@@ -6221,6 +6423,13 @@
             <a:prstDash val="solid"/>
           </a:ln>
         </p:spPr>
+        <p:txBody>
+          <a:bodyPr/>
+          <a:lstStyle/>
+          <a:p>
+            <a:endParaRPr lang="es-CL"/>
+          </a:p>
+        </p:txBody>
       </p:sp>
       <p:sp>
         <p:nvSpPr>
@@ -6331,6 +6540,13 @@
             </a:outerShdw>
           </a:effectLst>
         </p:spPr>
+        <p:txBody>
+          <a:bodyPr/>
+          <a:lstStyle/>
+          <a:p>
+            <a:endParaRPr lang="es-CL"/>
+          </a:p>
+        </p:txBody>
       </p:sp>
       <p:sp>
         <p:nvSpPr>
@@ -6356,6 +6572,13 @@
             <a:prstDash val="solid"/>
           </a:ln>
         </p:spPr>
+        <p:txBody>
+          <a:bodyPr/>
+          <a:lstStyle/>
+          <a:p>
+            <a:endParaRPr lang="es-CL"/>
+          </a:p>
+        </p:txBody>
       </p:sp>
       <p:sp>
         <p:nvSpPr>
@@ -6457,6 +6680,13 @@
             <a:prstDash val="solid"/>
           </a:ln>
         </p:spPr>
+        <p:txBody>
+          <a:bodyPr/>
+          <a:lstStyle/>
+          <a:p>
+            <a:endParaRPr lang="es-CL"/>
+          </a:p>
+        </p:txBody>
       </p:sp>
       <p:sp>
         <p:nvSpPr>
@@ -6829,6 +7059,13 @@
             </a:outerShdw>
           </a:effectLst>
         </p:spPr>
+        <p:txBody>
+          <a:bodyPr/>
+          <a:lstStyle/>
+          <a:p>
+            <a:endParaRPr lang="es-CL"/>
+          </a:p>
+        </p:txBody>
       </p:sp>
       <p:sp>
         <p:nvSpPr>
@@ -6854,6 +7091,13 @@
             <a:prstDash val="solid"/>
           </a:ln>
         </p:spPr>
+        <p:txBody>
+          <a:bodyPr/>
+          <a:lstStyle/>
+          <a:p>
+            <a:endParaRPr lang="es-CL"/>
+          </a:p>
+        </p:txBody>
       </p:sp>
       <p:sp>
         <p:nvSpPr>
@@ -7237,6 +7481,13 @@
             </a:outerShdw>
           </a:effectLst>
         </p:spPr>
+        <p:txBody>
+          <a:bodyPr/>
+          <a:lstStyle/>
+          <a:p>
+            <a:endParaRPr lang="es-CL"/>
+          </a:p>
+        </p:txBody>
       </p:sp>
       <p:sp>
         <p:nvSpPr>
@@ -7262,6 +7513,13 @@
             <a:prstDash val="solid"/>
           </a:ln>
         </p:spPr>
+        <p:txBody>
+          <a:bodyPr/>
+          <a:lstStyle/>
+          <a:p>
+            <a:endParaRPr lang="es-CL"/>
+          </a:p>
+        </p:txBody>
       </p:sp>
       <p:sp>
         <p:nvSpPr>
@@ -7795,6 +8053,13 @@
             </a:outerShdw>
           </a:effectLst>
         </p:spPr>
+        <p:txBody>
+          <a:bodyPr/>
+          <a:lstStyle/>
+          <a:p>
+            <a:endParaRPr lang="es-CL"/>
+          </a:p>
+        </p:txBody>
       </p:sp>
       <p:sp>
         <p:nvSpPr>
@@ -7820,6 +8085,13 @@
             <a:prstDash val="solid"/>
           </a:ln>
         </p:spPr>
+        <p:txBody>
+          <a:bodyPr/>
+          <a:lstStyle/>
+          <a:p>
+            <a:endParaRPr lang="es-CL"/>
+          </a:p>
+        </p:txBody>
       </p:sp>
       <p:sp>
         <p:nvSpPr>
@@ -8001,6 +8273,13 @@
             <a:prstDash val="solid"/>
           </a:ln>
         </p:spPr>
+        <p:txBody>
+          <a:bodyPr/>
+          <a:lstStyle/>
+          <a:p>
+            <a:endParaRPr lang="es-CL"/>
+          </a:p>
+        </p:txBody>
       </p:sp>
       <p:sp>
         <p:nvSpPr>
@@ -8072,6 +8351,13 @@
             </a:outerShdw>
           </a:effectLst>
         </p:spPr>
+        <p:txBody>
+          <a:bodyPr/>
+          <a:lstStyle/>
+          <a:p>
+            <a:endParaRPr lang="es-CL"/>
+          </a:p>
+        </p:txBody>
       </p:sp>
       <p:sp>
         <p:nvSpPr>
@@ -8097,6 +8383,13 @@
             <a:prstDash val="solid"/>
           </a:ln>
         </p:spPr>
+        <p:txBody>
+          <a:bodyPr/>
+          <a:lstStyle/>
+          <a:p>
+            <a:endParaRPr lang="es-CL"/>
+          </a:p>
+        </p:txBody>
       </p:sp>
       <p:sp>
         <p:nvSpPr>
@@ -8278,6 +8571,13 @@
             <a:prstDash val="solid"/>
           </a:ln>
         </p:spPr>
+        <p:txBody>
+          <a:bodyPr/>
+          <a:lstStyle/>
+          <a:p>
+            <a:endParaRPr lang="es-CL"/>
+          </a:p>
+        </p:txBody>
       </p:sp>
       <p:sp>
         <p:nvSpPr>
@@ -8349,6 +8649,13 @@
             </a:outerShdw>
           </a:effectLst>
         </p:spPr>
+        <p:txBody>
+          <a:bodyPr/>
+          <a:lstStyle/>
+          <a:p>
+            <a:endParaRPr lang="es-CL"/>
+          </a:p>
+        </p:txBody>
       </p:sp>
       <p:sp>
         <p:nvSpPr>
@@ -8374,6 +8681,13 @@
             <a:prstDash val="solid"/>
           </a:ln>
         </p:spPr>
+        <p:txBody>
+          <a:bodyPr/>
+          <a:lstStyle/>
+          <a:p>
+            <a:endParaRPr lang="es-CL"/>
+          </a:p>
+        </p:txBody>
       </p:sp>
       <p:sp>
         <p:nvSpPr>
@@ -8486,7 +8800,18 @@
                 <a:ea typeface="Calibri" pitchFamily="34" charset="-122"/>
                 <a:cs typeface="Calibri" pitchFamily="34" charset="-120"/>
               </a:rPr>
-              <a:t>•  Restricción para admins</a:t>
+              <a:t>•  Restricción para </a:t>
+            </a:r>
+            <a:r>
+              <a:rPr lang="en-US" sz="950" dirty="0" err="1">
+                <a:solidFill>
+                  <a:srgbClr val="1E293B"/>
+                </a:solidFill>
+                <a:latin typeface="Calibri" pitchFamily="34" charset="0"/>
+                <a:ea typeface="Calibri" pitchFamily="34" charset="-122"/>
+                <a:cs typeface="Calibri" pitchFamily="34" charset="-120"/>
+              </a:rPr>
+              <a:t>administradores</a:t>
             </a:r>
             <a:endParaRPr lang="en-US" sz="950" dirty="0"/>
           </a:p>
@@ -8516,6 +8841,13 @@
             <a:prstDash val="solid"/>
           </a:ln>
         </p:spPr>
+        <p:txBody>
+          <a:bodyPr/>
+          <a:lstStyle/>
+          <a:p>
+            <a:endParaRPr lang="es-CL"/>
+          </a:p>
+        </p:txBody>
       </p:sp>
       <p:sp>
         <p:nvSpPr>
@@ -8587,6 +8919,13 @@
             </a:outerShdw>
           </a:effectLst>
         </p:spPr>
+        <p:txBody>
+          <a:bodyPr/>
+          <a:lstStyle/>
+          <a:p>
+            <a:endParaRPr lang="es-CL"/>
+          </a:p>
+        </p:txBody>
       </p:sp>
       <p:sp>
         <p:nvSpPr>
@@ -8612,6 +8951,13 @@
             <a:prstDash val="solid"/>
           </a:ln>
         </p:spPr>
+        <p:txBody>
+          <a:bodyPr/>
+          <a:lstStyle/>
+          <a:p>
+            <a:endParaRPr lang="es-CL"/>
+          </a:p>
+        </p:txBody>
       </p:sp>
       <p:sp>
         <p:nvSpPr>
@@ -8871,6 +9217,13 @@
             <a:prstDash val="solid"/>
           </a:ln>
         </p:spPr>
+        <p:txBody>
+          <a:bodyPr/>
+          <a:lstStyle/>
+          <a:p>
+            <a:endParaRPr lang="es-CL"/>
+          </a:p>
+        </p:txBody>
       </p:sp>
       <p:sp>
         <p:nvSpPr>
@@ -9053,6 +9406,13 @@
             </a:outerShdw>
           </a:effectLst>
         </p:spPr>
+        <p:txBody>
+          <a:bodyPr/>
+          <a:lstStyle/>
+          <a:p>
+            <a:endParaRPr lang="es-CL"/>
+          </a:p>
+        </p:txBody>
       </p:sp>
       <p:sp>
         <p:nvSpPr>
@@ -9180,6 +9540,13 @@
             </a:outerShdw>
           </a:effectLst>
         </p:spPr>
+        <p:txBody>
+          <a:bodyPr/>
+          <a:lstStyle/>
+          <a:p>
+            <a:endParaRPr lang="es-CL"/>
+          </a:p>
+        </p:txBody>
       </p:sp>
       <p:sp>
         <p:nvSpPr>
@@ -9307,6 +9674,13 @@
             </a:outerShdw>
           </a:effectLst>
         </p:spPr>
+        <p:txBody>
+          <a:bodyPr/>
+          <a:lstStyle/>
+          <a:p>
+            <a:endParaRPr lang="es-CL"/>
+          </a:p>
+        </p:txBody>
       </p:sp>
       <p:sp>
         <p:nvSpPr>
@@ -9427,6 +9801,13 @@
             <a:prstDash val="solid"/>
           </a:ln>
         </p:spPr>
+        <p:txBody>
+          <a:bodyPr/>
+          <a:lstStyle/>
+          <a:p>
+            <a:endParaRPr lang="es-CL"/>
+          </a:p>
+        </p:txBody>
       </p:sp>
       <p:sp>
         <p:nvSpPr>
@@ -9648,6 +10029,13 @@
             </a:outerShdw>
           </a:effectLst>
         </p:spPr>
+        <p:txBody>
+          <a:bodyPr/>
+          <a:lstStyle/>
+          <a:p>
+            <a:endParaRPr lang="es-CL"/>
+          </a:p>
+        </p:txBody>
       </p:sp>
       <p:sp>
         <p:nvSpPr>
@@ -9673,6 +10061,13 @@
             <a:prstDash val="solid"/>
           </a:ln>
         </p:spPr>
+        <p:txBody>
+          <a:bodyPr/>
+          <a:lstStyle/>
+          <a:p>
+            <a:endParaRPr lang="es-CL"/>
+          </a:p>
+        </p:txBody>
       </p:sp>
       <p:sp>
         <p:nvSpPr>
@@ -9698,6 +10093,13 @@
             <a:prstDash val="solid"/>
           </a:ln>
         </p:spPr>
+        <p:txBody>
+          <a:bodyPr/>
+          <a:lstStyle/>
+          <a:p>
+            <a:endParaRPr lang="es-CL"/>
+          </a:p>
+        </p:txBody>
       </p:sp>
       <p:sp>
         <p:nvSpPr>
@@ -9847,6 +10249,13 @@
             </a:outerShdw>
           </a:effectLst>
         </p:spPr>
+        <p:txBody>
+          <a:bodyPr/>
+          <a:lstStyle/>
+          <a:p>
+            <a:endParaRPr lang="es-CL"/>
+          </a:p>
+        </p:txBody>
       </p:sp>
       <p:sp>
         <p:nvSpPr>
@@ -9872,6 +10281,13 @@
             <a:prstDash val="solid"/>
           </a:ln>
         </p:spPr>
+        <p:txBody>
+          <a:bodyPr/>
+          <a:lstStyle/>
+          <a:p>
+            <a:endParaRPr lang="es-CL"/>
+          </a:p>
+        </p:txBody>
       </p:sp>
       <p:sp>
         <p:nvSpPr>
@@ -9897,6 +10313,13 @@
             <a:prstDash val="solid"/>
           </a:ln>
         </p:spPr>
+        <p:txBody>
+          <a:bodyPr/>
+          <a:lstStyle/>
+          <a:p>
+            <a:endParaRPr lang="es-CL"/>
+          </a:p>
+        </p:txBody>
       </p:sp>
       <p:sp>
         <p:nvSpPr>
@@ -10046,6 +10469,13 @@
             </a:outerShdw>
           </a:effectLst>
         </p:spPr>
+        <p:txBody>
+          <a:bodyPr/>
+          <a:lstStyle/>
+          <a:p>
+            <a:endParaRPr lang="es-CL"/>
+          </a:p>
+        </p:txBody>
       </p:sp>
       <p:sp>
         <p:nvSpPr>
@@ -10071,6 +10501,13 @@
             <a:prstDash val="solid"/>
           </a:ln>
         </p:spPr>
+        <p:txBody>
+          <a:bodyPr/>
+          <a:lstStyle/>
+          <a:p>
+            <a:endParaRPr lang="es-CL"/>
+          </a:p>
+        </p:txBody>
       </p:sp>
       <p:sp>
         <p:nvSpPr>
@@ -10096,6 +10533,13 @@
             <a:prstDash val="solid"/>
           </a:ln>
         </p:spPr>
+        <p:txBody>
+          <a:bodyPr/>
+          <a:lstStyle/>
+          <a:p>
+            <a:endParaRPr lang="es-CL"/>
+          </a:p>
+        </p:txBody>
       </p:sp>
       <p:sp>
         <p:nvSpPr>
@@ -10245,6 +10689,13 @@
             </a:outerShdw>
           </a:effectLst>
         </p:spPr>
+        <p:txBody>
+          <a:bodyPr/>
+          <a:lstStyle/>
+          <a:p>
+            <a:endParaRPr lang="es-CL"/>
+          </a:p>
+        </p:txBody>
       </p:sp>
       <p:sp>
         <p:nvSpPr>
@@ -10270,6 +10721,13 @@
             <a:prstDash val="solid"/>
           </a:ln>
         </p:spPr>
+        <p:txBody>
+          <a:bodyPr/>
+          <a:lstStyle/>
+          <a:p>
+            <a:endParaRPr lang="es-CL"/>
+          </a:p>
+        </p:txBody>
       </p:sp>
       <p:sp>
         <p:nvSpPr>
@@ -10295,6 +10753,13 @@
             <a:prstDash val="solid"/>
           </a:ln>
         </p:spPr>
+        <p:txBody>
+          <a:bodyPr/>
+          <a:lstStyle/>
+          <a:p>
+            <a:endParaRPr lang="es-CL"/>
+          </a:p>
+        </p:txBody>
       </p:sp>
       <p:sp>
         <p:nvSpPr>
@@ -10444,6 +10909,13 @@
             </a:outerShdw>
           </a:effectLst>
         </p:spPr>
+        <p:txBody>
+          <a:bodyPr/>
+          <a:lstStyle/>
+          <a:p>
+            <a:endParaRPr lang="es-CL"/>
+          </a:p>
+        </p:txBody>
       </p:sp>
       <p:sp>
         <p:nvSpPr>
@@ -10469,6 +10941,13 @@
             <a:prstDash val="solid"/>
           </a:ln>
         </p:spPr>
+        <p:txBody>
+          <a:bodyPr/>
+          <a:lstStyle/>
+          <a:p>
+            <a:endParaRPr lang="es-CL"/>
+          </a:p>
+        </p:txBody>
       </p:sp>
       <p:sp>
         <p:nvSpPr>
@@ -10494,6 +10973,13 @@
             <a:prstDash val="solid"/>
           </a:ln>
         </p:spPr>
+        <p:txBody>
+          <a:bodyPr/>
+          <a:lstStyle/>
+          <a:p>
+            <a:endParaRPr lang="es-CL"/>
+          </a:p>
+        </p:txBody>
       </p:sp>
       <p:sp>
         <p:nvSpPr>
@@ -10643,6 +11129,13 @@
             </a:outerShdw>
           </a:effectLst>
         </p:spPr>
+        <p:txBody>
+          <a:bodyPr/>
+          <a:lstStyle/>
+          <a:p>
+            <a:endParaRPr lang="es-CL"/>
+          </a:p>
+        </p:txBody>
       </p:sp>
       <p:sp>
         <p:nvSpPr>
@@ -10668,6 +11161,13 @@
             <a:prstDash val="solid"/>
           </a:ln>
         </p:spPr>
+        <p:txBody>
+          <a:bodyPr/>
+          <a:lstStyle/>
+          <a:p>
+            <a:endParaRPr lang="es-CL"/>
+          </a:p>
+        </p:txBody>
       </p:sp>
       <p:sp>
         <p:nvSpPr>
@@ -10693,6 +11193,13 @@
             <a:prstDash val="solid"/>
           </a:ln>
         </p:spPr>
+        <p:txBody>
+          <a:bodyPr/>
+          <a:lstStyle/>
+          <a:p>
+            <a:endParaRPr lang="es-CL"/>
+          </a:p>
+        </p:txBody>
       </p:sp>
       <p:sp>
         <p:nvSpPr>
